--- a/ComputerVision.pptx
+++ b/ComputerVision.pptx
@@ -13,8 +13,10 @@
     <p:sldId id="261" r:id="rId7"/>
     <p:sldId id="262" r:id="rId8"/>
     <p:sldId id="263" r:id="rId9"/>
+    <p:sldId id="267" r:id="rId17"/>
     <p:sldId id="264" r:id="rId10"/>
     <p:sldId id="265" r:id="rId11"/>
+    <p:sldId id="268" r:id="rId18"/>
     <p:sldId id="266" r:id="rId12"/>
   </p:sldIdLst>
   <p:sldSz cx="12192000" cy="6858000"/>
@@ -3825,6 +3827,196 @@
         <p14:creationId xmlns:p14="http://schemas.microsoft.com/office/powerpoint/2010/main" val="2635986785"/>
       </p:ext>
     </p:extLst>
+  </p:cSld>
+  <p:clrMapOvr>
+    <a:masterClrMapping/>
+  </p:clrMapOvr>
+</p:sld>
+</file>
+
+<file path=ppt/slides/slide12.xml><?xml version="1.0" encoding="utf-8"?>
+<p:sld xmlns:a="http://schemas.openxmlformats.org/drawingml/2006/main" xmlns:p="http://schemas.openxmlformats.org/presentationml/2006/main" xmlns:r="http://schemas.openxmlformats.org/officeDocument/2006/relationships">
+  <p:cSld>
+    <p:spTree>
+      <p:nvGrpSpPr>
+        <p:cNvPr id="1" name=""/>
+        <p:cNvGrpSpPr/>
+        <p:nvPr/>
+      </p:nvGrpSpPr>
+      <p:grpSpPr/>
+      <p:sp>
+        <p:nvSpPr>
+          <p:cNvPr id="2" name="Title 1"/>
+          <p:cNvSpPr>
+            <a:spLocks noGrp="1"/>
+          </p:cNvSpPr>
+          <p:nvPr>
+            <p:ph type="title"/>
+          </p:nvPr>
+        </p:nvSpPr>
+        <p:spPr>
+          <a:xfrm>
+            <a:off x="841248" y="365760"/>
+            <a:ext cx="10515600" cy="1325880"/>
+          </a:xfrm>
+        </p:spPr>
+        <p:txBody>
+          <a:bodyPr/>
+          <a:lstStyle/>
+          <a:p>
+            <a:r>
+              <a:t>Baseline: pre-trained detectors</a:t>
+            </a:r>
+          </a:p>
+        </p:txBody>
+      </p:sp>
+      <p:sp>
+        <p:nvSpPr>
+          <p:cNvPr id="3" name="Content Placeholder 2"/>
+          <p:cNvSpPr>
+            <a:spLocks noGrp="1"/>
+          </p:cNvSpPr>
+          <p:nvPr>
+            <p:ph idx="1"/>
+          </p:nvPr>
+        </p:nvSpPr>
+        <p:spPr>
+          <a:xfrm>
+            <a:off x="841248" y="1828800"/>
+            <a:ext cx="10515600" cy="4352544"/>
+          </a:xfrm>
+        </p:spPr>
+        <p:txBody>
+          <a:bodyPr wrap="square"/>
+          <a:lstStyle/>
+          <a:p>
+            <a:r>
+              <a:rPr sz="1600"/>
+              <a:t>Four public AI-image detectors run zero-shot on our benchmark — same images, same splits, nothing fine-tuned. Stratified by sensitivity level, scored with severity-weighted risk.</a:t>
+            </a:r>
+          </a:p>
+          <a:p>
+            <a:r>
+              <a:rPr sz="1600"/>
+              <a:t>Best off-the-shelf (SwinV2): 0.821 AUC, but 1 in 4 errors on L3–L5. A face-deepfake ViT sits at chance — it has nothing to say about textures or conflict photos.</a:t>
+            </a:r>
+          </a:p>
+        </p:txBody>
+      </p:sp>
+      <p:pic>
+        <p:nvPicPr>
+          <p:cNvPr id="4" name="Picture 3" descr="08_pretrained_vs_ours.png"/>
+          <p:cNvPicPr>
+            <a:picLocks noChangeAspect="1"/>
+          </p:cNvPicPr>
+          <p:nvPr/>
+        </p:nvPicPr>
+        <p:blipFill>
+          <a:blip r:embed="rId2"/>
+          <a:stretch>
+            <a:fillRect/>
+          </a:stretch>
+        </p:blipFill>
+        <p:spPr>
+          <a:xfrm>
+            <a:off x="1234440" y="3291840"/>
+            <a:ext cx="9692640" cy="3429703"/>
+          </a:xfrm>
+          <a:prstGeom prst="rect">
+            <a:avLst/>
+          </a:prstGeom>
+        </p:spPr>
+      </p:pic>
+    </p:spTree>
+  </p:cSld>
+  <p:clrMapOvr>
+    <a:masterClrMapping/>
+  </p:clrMapOvr>
+</p:sld>
+</file>
+
+<file path=ppt/slides/slide13.xml><?xml version="1.0" encoding="utf-8"?>
+<p:sld xmlns:a="http://schemas.openxmlformats.org/drawingml/2006/main" xmlns:p="http://schemas.openxmlformats.org/presentationml/2006/main" xmlns:r="http://schemas.openxmlformats.org/officeDocument/2006/relationships">
+  <p:cSld>
+    <p:spTree>
+      <p:nvGrpSpPr>
+        <p:cNvPr id="1" name=""/>
+        <p:cNvGrpSpPr/>
+        <p:nvPr/>
+      </p:nvGrpSpPr>
+      <p:grpSpPr/>
+      <p:sp>
+        <p:nvSpPr>
+          <p:cNvPr id="2" name="Title 1"/>
+          <p:cNvSpPr>
+            <a:spLocks noGrp="1"/>
+          </p:cNvSpPr>
+          <p:nvPr>
+            <p:ph type="title"/>
+          </p:nvPr>
+        </p:nvSpPr>
+        <p:spPr>
+          <a:xfrm>
+            <a:off x="841248" y="365760"/>
+            <a:ext cx="10515600" cy="1325880"/>
+          </a:xfrm>
+        </p:spPr>
+        <p:txBody>
+          <a:bodyPr/>
+          <a:lstStyle/>
+          <a:p>
+            <a:r>
+              <a:t>Ethics of a sensitivity-aware detector</a:t>
+            </a:r>
+          </a:p>
+        </p:txBody>
+      </p:sp>
+      <p:sp>
+        <p:nvSpPr>
+          <p:cNvPr id="3" name="Content Placeholder 2"/>
+          <p:cNvSpPr>
+            <a:spLocks noGrp="1"/>
+          </p:cNvSpPr>
+          <p:nvPr>
+            <p:ph idx="1"/>
+          </p:nvPr>
+        </p:nvSpPr>
+        <p:spPr>
+          <a:xfrm>
+            <a:off x="841248" y="1828800"/>
+            <a:ext cx="10515600" cy="4352544"/>
+          </a:xfrm>
+        </p:spPr>
+        <p:txBody>
+          <a:bodyPr wrap="square"/>
+          <a:lstStyle/>
+          <a:p>
+            <a:r>
+              <a:rPr sz="1700"/>
+              <a:t>The taxonomy is policy, not measurement — our scale is a Western, journalistic reading of harm; another scale moves the model's attention elsewhere</a:t>
+            </a:r>
+          </a:p>
+          <a:p>
+            <a:r>
+              <a:rPr sz="1700"/>
+              <a:t>The error cost is asymmetric on purpose — fewer mistakes on L5 means more on L1, so ordinary people's images get the less careful model. A stated trade, not a silent default</a:t>
+            </a:r>
+          </a:p>
+          <a:p>
+            <a:r>
+              <a:rPr sz="1700"/>
+              <a:t>Flagging is one step from ranking — a score for “politically sensitive” is trivially repurposed. This belongs behind a human reviewer, never in front of an automatic takedown</a:t>
+            </a:r>
+          </a:p>
+          <a:p>
+            <a:r>
+              <a:rPr sz="1600"/>
+              <a:t>The synthetic images depict no real person, event or brand, and are EXIF-marked as synthetic</a:t>
+            </a:r>
+          </a:p>
+        </p:txBody>
+      </p:sp>
+    </p:spTree>
   </p:cSld>
   <p:clrMapOvr>
     <a:masterClrMapping/>
